--- a/static/img/tg-forum/partner-logo/logos.pptx
+++ b/static/img/tg-forum/partner-logo/logos.pptx
@@ -6,20 +6,22 @@
     <p:sldMasterId id="2147483660" r:id="rId2"/>
   </p:sldMasterIdLst>
   <p:sldIdLst>
-    <p:sldId id="258" r:id="rId3"/>
-    <p:sldId id="256" r:id="rId4"/>
-    <p:sldId id="257" r:id="rId5"/>
-    <p:sldId id="259" r:id="rId6"/>
-    <p:sldId id="260" r:id="rId7"/>
-    <p:sldId id="261" r:id="rId8"/>
-    <p:sldId id="262" r:id="rId9"/>
-    <p:sldId id="263" r:id="rId10"/>
-    <p:sldId id="264" r:id="rId11"/>
-    <p:sldId id="265" r:id="rId12"/>
-    <p:sldId id="271" r:id="rId13"/>
-    <p:sldId id="266" r:id="rId14"/>
-    <p:sldId id="267" r:id="rId15"/>
-    <p:sldId id="272" r:id="rId16"/>
+    <p:sldId id="273" r:id="rId3"/>
+    <p:sldId id="274" r:id="rId4"/>
+    <p:sldId id="258" r:id="rId5"/>
+    <p:sldId id="256" r:id="rId6"/>
+    <p:sldId id="257" r:id="rId7"/>
+    <p:sldId id="259" r:id="rId8"/>
+    <p:sldId id="260" r:id="rId9"/>
+    <p:sldId id="261" r:id="rId10"/>
+    <p:sldId id="262" r:id="rId11"/>
+    <p:sldId id="263" r:id="rId12"/>
+    <p:sldId id="264" r:id="rId13"/>
+    <p:sldId id="265" r:id="rId14"/>
+    <p:sldId id="271" r:id="rId15"/>
+    <p:sldId id="266" r:id="rId16"/>
+    <p:sldId id="267" r:id="rId17"/>
+    <p:sldId id="272" r:id="rId18"/>
   </p:sldIdLst>
   <p:sldSz cx="12192000" cy="6858000"/>
   <p:notesSz cx="6858000" cy="9144000"/>
@@ -255,7 +257,7 @@
           <a:p>
             <a:fld id="{26C1D8DE-D085-B844-8474-AFD779F84500}" type="datetimeFigureOut">
               <a:rPr lang="zh-CN" altLang="en-US"/>
-              <a:t>2026/2/27</a:t>
+              <a:t>2026/3/3</a:t>
             </a:fld>
             <a:endParaRPr kumimoji="1" lang="zh-CN" altLang="en-US"/>
           </a:p>
@@ -418,7 +420,7 @@
           <a:p>
             <a:fld id="{26C1D8DE-D085-B844-8474-AFD779F84500}" type="datetimeFigureOut">
               <a:rPr lang="zh-CN" altLang="en-US"/>
-              <a:t>2026/2/27</a:t>
+              <a:t>2026/3/3</a:t>
             </a:fld>
             <a:endParaRPr kumimoji="1" lang="zh-CN" altLang="en-US"/>
           </a:p>
@@ -591,7 +593,7 @@
           <a:p>
             <a:fld id="{26C1D8DE-D085-B844-8474-AFD779F84500}" type="datetimeFigureOut">
               <a:rPr lang="zh-CN" altLang="en-US"/>
-              <a:t>2026/2/27</a:t>
+              <a:t>2026/3/3</a:t>
             </a:fld>
             <a:endParaRPr kumimoji="1" lang="zh-CN" altLang="en-US"/>
           </a:p>
@@ -776,7 +778,7 @@
           <a:p>
             <a:fld id="{26C1D8DE-D085-B844-8474-AFD779F84500}" type="datetimeFigureOut">
               <a:rPr lang="zh-CN" altLang="en-US"/>
-              <a:t>2026/2/27</a:t>
+              <a:t>2026/3/3</a:t>
             </a:fld>
             <a:endParaRPr kumimoji="1" lang="zh-CN" altLang="en-US"/>
           </a:p>
@@ -939,7 +941,7 @@
           <a:p>
             <a:fld id="{26C1D8DE-D085-B844-8474-AFD779F84500}" type="datetimeFigureOut">
               <a:rPr lang="zh-CN" altLang="en-US"/>
-              <a:t>2026/2/27</a:t>
+              <a:t>2026/3/3</a:t>
             </a:fld>
             <a:endParaRPr kumimoji="1" lang="zh-CN" altLang="en-US"/>
           </a:p>
@@ -1179,7 +1181,7 @@
           <a:p>
             <a:fld id="{26C1D8DE-D085-B844-8474-AFD779F84500}" type="datetimeFigureOut">
               <a:rPr lang="zh-CN" altLang="en-US"/>
-              <a:t>2026/2/27</a:t>
+              <a:t>2026/3/3</a:t>
             </a:fld>
             <a:endParaRPr kumimoji="1" lang="zh-CN" altLang="en-US"/>
           </a:p>
@@ -1403,7 +1405,7 @@
           <a:p>
             <a:fld id="{26C1D8DE-D085-B844-8474-AFD779F84500}" type="datetimeFigureOut">
               <a:rPr lang="zh-CN" altLang="en-US"/>
-              <a:t>2026/2/27</a:t>
+              <a:t>2026/3/3</a:t>
             </a:fld>
             <a:endParaRPr kumimoji="1" lang="zh-CN" altLang="en-US"/>
           </a:p>
@@ -1762,7 +1764,7 @@
           <a:p>
             <a:fld id="{26C1D8DE-D085-B844-8474-AFD779F84500}" type="datetimeFigureOut">
               <a:rPr lang="zh-CN" altLang="en-US"/>
-              <a:t>2026/2/27</a:t>
+              <a:t>2026/3/3</a:t>
             </a:fld>
             <a:endParaRPr kumimoji="1" lang="zh-CN" altLang="en-US"/>
           </a:p>
@@ -1874,7 +1876,7 @@
           <a:p>
             <a:fld id="{26C1D8DE-D085-B844-8474-AFD779F84500}" type="datetimeFigureOut">
               <a:rPr lang="zh-CN" altLang="en-US"/>
-              <a:t>2026/2/27</a:t>
+              <a:t>2026/3/3</a:t>
             </a:fld>
             <a:endParaRPr kumimoji="1" lang="zh-CN" altLang="en-US"/>
           </a:p>
@@ -1964,7 +1966,7 @@
           <a:p>
             <a:fld id="{26C1D8DE-D085-B844-8474-AFD779F84500}" type="datetimeFigureOut">
               <a:rPr lang="zh-CN" altLang="en-US"/>
-              <a:t>2026/2/27</a:t>
+              <a:t>2026/3/3</a:t>
             </a:fld>
             <a:endParaRPr kumimoji="1" lang="zh-CN" altLang="en-US"/>
           </a:p>
@@ -2234,7 +2236,7 @@
           <a:p>
             <a:fld id="{26C1D8DE-D085-B844-8474-AFD779F84500}" type="datetimeFigureOut">
               <a:rPr lang="zh-CN" altLang="en-US"/>
-              <a:t>2026/2/27</a:t>
+              <a:t>2026/3/3</a:t>
             </a:fld>
             <a:endParaRPr kumimoji="1" lang="zh-CN" altLang="en-US"/>
           </a:p>
@@ -2397,7 +2399,7 @@
           <a:p>
             <a:fld id="{26C1D8DE-D085-B844-8474-AFD779F84500}" type="datetimeFigureOut">
               <a:rPr lang="zh-CN" altLang="en-US"/>
-              <a:t>2026/2/27</a:t>
+              <a:t>2026/3/3</a:t>
             </a:fld>
             <a:endParaRPr kumimoji="1" lang="zh-CN" altLang="en-US"/>
           </a:p>
@@ -2644,7 +2646,7 @@
           <a:p>
             <a:fld id="{26C1D8DE-D085-B844-8474-AFD779F84500}" type="datetimeFigureOut">
               <a:rPr lang="zh-CN" altLang="en-US"/>
-              <a:t>2026/2/27</a:t>
+              <a:t>2026/3/3</a:t>
             </a:fld>
             <a:endParaRPr kumimoji="1" lang="zh-CN" altLang="en-US"/>
           </a:p>
@@ -2807,7 +2809,7 @@
           <a:p>
             <a:fld id="{26C1D8DE-D085-B844-8474-AFD779F84500}" type="datetimeFigureOut">
               <a:rPr lang="zh-CN" altLang="en-US"/>
-              <a:t>2026/2/27</a:t>
+              <a:t>2026/3/3</a:t>
             </a:fld>
             <a:endParaRPr kumimoji="1" lang="zh-CN" altLang="en-US"/>
           </a:p>
@@ -2980,7 +2982,7 @@
           <a:p>
             <a:fld id="{26C1D8DE-D085-B844-8474-AFD779F84500}" type="datetimeFigureOut">
               <a:rPr lang="zh-CN" altLang="en-US"/>
-              <a:t>2026/2/27</a:t>
+              <a:t>2026/3/3</a:t>
             </a:fld>
             <a:endParaRPr kumimoji="1" lang="zh-CN" altLang="en-US"/>
           </a:p>
@@ -3220,7 +3222,7 @@
           <a:p>
             <a:fld id="{26C1D8DE-D085-B844-8474-AFD779F84500}" type="datetimeFigureOut">
               <a:rPr lang="zh-CN" altLang="en-US"/>
-              <a:t>2026/2/27</a:t>
+              <a:t>2026/3/3</a:t>
             </a:fld>
             <a:endParaRPr kumimoji="1" lang="zh-CN" altLang="en-US"/>
           </a:p>
@@ -3444,7 +3446,7 @@
           <a:p>
             <a:fld id="{26C1D8DE-D085-B844-8474-AFD779F84500}" type="datetimeFigureOut">
               <a:rPr lang="zh-CN" altLang="en-US"/>
-              <a:t>2026/2/27</a:t>
+              <a:t>2026/3/3</a:t>
             </a:fld>
             <a:endParaRPr kumimoji="1" lang="zh-CN" altLang="en-US"/>
           </a:p>
@@ -3803,7 +3805,7 @@
           <a:p>
             <a:fld id="{26C1D8DE-D085-B844-8474-AFD779F84500}" type="datetimeFigureOut">
               <a:rPr lang="zh-CN" altLang="en-US"/>
-              <a:t>2026/2/27</a:t>
+              <a:t>2026/3/3</a:t>
             </a:fld>
             <a:endParaRPr kumimoji="1" lang="zh-CN" altLang="en-US"/>
           </a:p>
@@ -3915,7 +3917,7 @@
           <a:p>
             <a:fld id="{26C1D8DE-D085-B844-8474-AFD779F84500}" type="datetimeFigureOut">
               <a:rPr lang="zh-CN" altLang="en-US"/>
-              <a:t>2026/2/27</a:t>
+              <a:t>2026/3/3</a:t>
             </a:fld>
             <a:endParaRPr kumimoji="1" lang="zh-CN" altLang="en-US"/>
           </a:p>
@@ -4005,7 +4007,7 @@
           <a:p>
             <a:fld id="{26C1D8DE-D085-B844-8474-AFD779F84500}" type="datetimeFigureOut">
               <a:rPr lang="zh-CN" altLang="en-US"/>
-              <a:t>2026/2/27</a:t>
+              <a:t>2026/3/3</a:t>
             </a:fld>
             <a:endParaRPr kumimoji="1" lang="zh-CN" altLang="en-US"/>
           </a:p>
@@ -4275,7 +4277,7 @@
           <a:p>
             <a:fld id="{26C1D8DE-D085-B844-8474-AFD779F84500}" type="datetimeFigureOut">
               <a:rPr lang="zh-CN" altLang="en-US"/>
-              <a:t>2026/2/27</a:t>
+              <a:t>2026/3/3</a:t>
             </a:fld>
             <a:endParaRPr kumimoji="1" lang="zh-CN" altLang="en-US"/>
           </a:p>
@@ -4522,7 +4524,7 @@
           <a:p>
             <a:fld id="{26C1D8DE-D085-B844-8474-AFD779F84500}" type="datetimeFigureOut">
               <a:rPr lang="zh-CN" altLang="en-US"/>
-              <a:t>2026/2/27</a:t>
+              <a:t>2026/3/3</a:t>
             </a:fld>
             <a:endParaRPr kumimoji="1" lang="zh-CN" altLang="en-US"/>
           </a:p>
@@ -4728,7 +4730,7 @@
           <a:p>
             <a:fld id="{26C1D8DE-D085-B844-8474-AFD779F84500}" type="datetimeFigureOut">
               <a:rPr lang="zh-CN" altLang="en-US"/>
-              <a:t>2026/2/27</a:t>
+              <a:t>2026/3/3</a:t>
             </a:fld>
             <a:endParaRPr kumimoji="1" lang="zh-CN" altLang="en-US"/>
           </a:p>
@@ -5261,7 +5263,7 @@
           <a:p>
             <a:fld id="{26C1D8DE-D085-B844-8474-AFD779F84500}" type="datetimeFigureOut">
               <a:rPr lang="zh-CN" altLang="en-US"/>
-              <a:t>2026/2/27</a:t>
+              <a:t>2026/3/3</a:t>
             </a:fld>
             <a:endParaRPr kumimoji="1" lang="zh-CN" altLang="en-US"/>
           </a:p>
@@ -5661,89 +5663,90 @@
           <a:chExt cx="0" cy="0"/>
         </a:xfrm>
       </p:grpSpPr>
-      <p:grpSp>
-        <p:nvGrpSpPr>
-          <p:cNvPr id="7" name="组合 6"/>
-          <p:cNvGrpSpPr/>
+      <p:pic>
+        <p:nvPicPr>
+          <p:cNvPr id="5" name="图片 4" descr="文本&#10;&#10;AI 生成的内容可能不正确。">
+            <a:extLst>
+              <a:ext uri="{FF2B5EF4-FFF2-40B4-BE49-F238E27FC236}">
+                <a16:creationId xmlns:a16="http://schemas.microsoft.com/office/drawing/2014/main" id="{78A0118D-F72A-1AB9-53B8-BCE3F39DC801}"/>
+              </a:ext>
+            </a:extLst>
+          </p:cNvPr>
+          <p:cNvPicPr>
+            <a:picLocks noChangeAspect="1"/>
+          </p:cNvPicPr>
           <p:nvPr/>
-        </p:nvGrpSpPr>
-        <p:grpSpPr>
+        </p:nvPicPr>
+        <p:blipFill>
+          <a:blip r:embed="rId2"/>
+          <a:stretch>
+            <a:fillRect/>
+          </a:stretch>
+        </p:blipFill>
+        <p:spPr>
           <a:xfrm>
-            <a:off x="294083" y="1287744"/>
-            <a:ext cx="11603834" cy="4224074"/>
-            <a:chOff x="716561" y="1369452"/>
-            <a:chExt cx="10758878" cy="3916491"/>
+            <a:off x="1101552" y="2430110"/>
+            <a:ext cx="9988895" cy="1997779"/>
           </a:xfrm>
-        </p:grpSpPr>
-        <p:pic>
-          <p:nvPicPr>
-            <p:cNvPr id="5" name="图片 4"/>
-            <p:cNvPicPr>
-              <a:picLocks noChangeAspect="1"/>
-            </p:cNvPicPr>
-            <p:nvPr/>
-          </p:nvPicPr>
-          <p:blipFill>
-            <a:blip r:embed="rId2"/>
-            <a:stretch>
-              <a:fillRect/>
-            </a:stretch>
-          </p:blipFill>
-          <p:spPr>
-            <a:xfrm>
-              <a:off x="2209800" y="1369452"/>
-              <a:ext cx="7772400" cy="3261632"/>
-            </a:xfrm>
-            <a:prstGeom prst="rect">
-              <a:avLst/>
-            </a:prstGeom>
-          </p:spPr>
-        </p:pic>
-        <p:sp>
-          <p:nvSpPr>
-            <p:cNvPr id="6" name="文本框 5"/>
-            <p:cNvSpPr txBox="1"/>
-            <p:nvPr/>
-          </p:nvSpPr>
-          <p:spPr>
-            <a:xfrm>
-              <a:off x="716561" y="4686676"/>
-              <a:ext cx="10758878" cy="599267"/>
-            </a:xfrm>
-            <a:prstGeom prst="rect">
-              <a:avLst/>
-            </a:prstGeom>
-            <a:noFill/>
-          </p:spPr>
-          <p:txBody>
-            <a:bodyPr wrap="square">
-              <a:spAutoFit/>
-            </a:bodyPr>
-            <a:lstStyle/>
-            <a:p>
-              <a:pPr algn="ctr"/>
-              <a:r>
-                <a:rPr lang="zh-CN" altLang="en-US" sz="3600" b="1" i="0">
-                  <a:solidFill>
-                    <a:srgbClr val="016DAA"/>
-                  </a:solidFill>
-                  <a:effectLst/>
-                  <a:latin typeface="Helvetica" pitchFamily="2" charset="0"/>
-                  <a:ea typeface="黑体" panose="02010609060101010101" pitchFamily="49" charset="-122"/>
-                </a:rPr>
-                <a:t>碳中和与能源智联 国际大科学计划培育项目</a:t>
-              </a:r>
-              <a:endParaRPr lang="zh-CN" altLang="en-US" sz="3200" b="1">
-                <a:solidFill>
-                  <a:srgbClr val="016DAA"/>
-                </a:solidFill>
-                <a:latin typeface="Helvetica" pitchFamily="2" charset="0"/>
-                <a:ea typeface="黑体" panose="02010609060101010101" pitchFamily="49" charset="-122"/>
-              </a:endParaRPr>
-            </a:p>
-          </p:txBody>
-        </p:sp>
-      </p:grpSp>
+          <a:prstGeom prst="rect">
+            <a:avLst/>
+          </a:prstGeom>
+        </p:spPr>
+      </p:pic>
+    </p:spTree>
+    <p:extLst>
+      <p:ext uri="{BB962C8B-B14F-4D97-AF65-F5344CB8AC3E}">
+        <p14:creationId xmlns:p14="http://schemas.microsoft.com/office/powerpoint/2010/main" val="1609923106"/>
+      </p:ext>
+    </p:extLst>
+  </p:cSld>
+  <p:clrMapOvr>
+    <a:masterClrMapping/>
+  </p:clrMapOvr>
+</p:sld>
+</file>
+
+<file path=ppt/slides/slide10.xml><?xml version="1.0" encoding="utf-8"?>
+<p:sld xmlns:a="http://schemas.openxmlformats.org/drawingml/2006/main" xmlns:r="http://schemas.openxmlformats.org/officeDocument/2006/relationships" xmlns:p="http://schemas.openxmlformats.org/presentationml/2006/main">
+  <p:cSld>
+    <p:spTree>
+      <p:nvGrpSpPr>
+        <p:cNvPr id="1" name=""/>
+        <p:cNvGrpSpPr/>
+        <p:nvPr/>
+      </p:nvGrpSpPr>
+      <p:grpSpPr>
+        <a:xfrm>
+          <a:off x="0" y="0"/>
+          <a:ext cx="0" cy="0"/>
+          <a:chOff x="0" y="0"/>
+          <a:chExt cx="0" cy="0"/>
+        </a:xfrm>
+      </p:grpSpPr>
+      <p:pic>
+        <p:nvPicPr>
+          <p:cNvPr id="4" name="图片 3" descr="envision"/>
+          <p:cNvPicPr>
+            <a:picLocks noChangeAspect="1"/>
+          </p:cNvPicPr>
+          <p:nvPr/>
+        </p:nvPicPr>
+        <p:blipFill>
+          <a:blip r:embed="rId2"/>
+          <a:stretch>
+            <a:fillRect/>
+          </a:stretch>
+        </p:blipFill>
+        <p:spPr>
+          <a:xfrm>
+            <a:off x="1374603" y="2440402"/>
+            <a:ext cx="9442794" cy="1977196"/>
+          </a:xfrm>
+          <a:prstGeom prst="rect">
+            <a:avLst/>
+          </a:prstGeom>
+        </p:spPr>
+      </p:pic>
     </p:spTree>
   </p:cSld>
   <p:clrMapOvr>
@@ -5752,7 +5755,56 @@
 </p:sld>
 </file>
 
-<file path=ppt/slides/slide10.xml><?xml version="1.0" encoding="utf-8"?>
+<file path=ppt/slides/slide11.xml><?xml version="1.0" encoding="utf-8"?>
+<p:sld xmlns:a="http://schemas.openxmlformats.org/drawingml/2006/main" xmlns:r="http://schemas.openxmlformats.org/officeDocument/2006/relationships" xmlns:p="http://schemas.openxmlformats.org/presentationml/2006/main">
+  <p:cSld>
+    <p:spTree>
+      <p:nvGrpSpPr>
+        <p:cNvPr id="1" name=""/>
+        <p:cNvGrpSpPr/>
+        <p:nvPr/>
+      </p:nvGrpSpPr>
+      <p:grpSpPr>
+        <a:xfrm>
+          <a:off x="0" y="0"/>
+          <a:ext cx="0" cy="0"/>
+          <a:chOff x="0" y="0"/>
+          <a:chExt cx="0" cy="0"/>
+        </a:xfrm>
+      </p:grpSpPr>
+      <p:pic>
+        <p:nvPicPr>
+          <p:cNvPr id="4" name="图片 3" descr="hiq"/>
+          <p:cNvPicPr>
+            <a:picLocks noChangeAspect="1"/>
+          </p:cNvPicPr>
+          <p:nvPr/>
+        </p:nvPicPr>
+        <p:blipFill>
+          <a:blip r:embed="rId2"/>
+          <a:stretch>
+            <a:fillRect/>
+          </a:stretch>
+        </p:blipFill>
+        <p:spPr>
+          <a:xfrm>
+            <a:off x="2845435" y="1471930"/>
+            <a:ext cx="6501765" cy="3914140"/>
+          </a:xfrm>
+          <a:prstGeom prst="rect">
+            <a:avLst/>
+          </a:prstGeom>
+        </p:spPr>
+      </p:pic>
+    </p:spTree>
+  </p:cSld>
+  <p:clrMapOvr>
+    <a:masterClrMapping/>
+  </p:clrMapOvr>
+</p:sld>
+</file>
+
+<file path=ppt/slides/slide12.xml><?xml version="1.0" encoding="utf-8"?>
 <p:sld xmlns:a="http://schemas.openxmlformats.org/drawingml/2006/main" xmlns:r="http://schemas.openxmlformats.org/officeDocument/2006/relationships" xmlns:p="http://schemas.openxmlformats.org/presentationml/2006/main">
   <p:cSld>
     <p:spTree>
@@ -5801,7 +5853,7 @@
 </p:sld>
 </file>
 
-<file path=ppt/slides/slide11.xml><?xml version="1.0" encoding="utf-8"?>
+<file path=ppt/slides/slide13.xml><?xml version="1.0" encoding="utf-8"?>
 <p:sld xmlns:a="http://schemas.openxmlformats.org/drawingml/2006/main" xmlns:r="http://schemas.openxmlformats.org/officeDocument/2006/relationships" xmlns:p="http://schemas.openxmlformats.org/presentationml/2006/main">
   <p:cSld>
     <p:spTree>
@@ -5850,7 +5902,7 @@
 </p:sld>
 </file>
 
-<file path=ppt/slides/slide12.xml><?xml version="1.0" encoding="utf-8"?>
+<file path=ppt/slides/slide14.xml><?xml version="1.0" encoding="utf-8"?>
 <p:sld xmlns:a="http://schemas.openxmlformats.org/drawingml/2006/main" xmlns:r="http://schemas.openxmlformats.org/officeDocument/2006/relationships" xmlns:p="http://schemas.openxmlformats.org/presentationml/2006/main">
   <p:cSld>
     <p:spTree>
@@ -5899,7 +5951,7 @@
 </p:sld>
 </file>
 
-<file path=ppt/slides/slide13.xml><?xml version="1.0" encoding="utf-8"?>
+<file path=ppt/slides/slide15.xml><?xml version="1.0" encoding="utf-8"?>
 <p:sld xmlns:a="http://schemas.openxmlformats.org/drawingml/2006/main" xmlns:r="http://schemas.openxmlformats.org/officeDocument/2006/relationships" xmlns:p="http://schemas.openxmlformats.org/presentationml/2006/main">
   <p:cSld>
     <p:spTree>
@@ -5948,7 +6000,7 @@
 </p:sld>
 </file>
 
-<file path=ppt/slides/slide14.xml><?xml version="1.0" encoding="utf-8"?>
+<file path=ppt/slides/slide16.xml><?xml version="1.0" encoding="utf-8"?>
 <p:sld xmlns:a="http://schemas.openxmlformats.org/drawingml/2006/main" xmlns:r="http://schemas.openxmlformats.org/officeDocument/2006/relationships" xmlns:p="http://schemas.openxmlformats.org/presentationml/2006/main">
   <p:cSld>
     <p:spTree>
@@ -6055,6 +6107,175 @@
       </p:grpSpPr>
       <p:pic>
         <p:nvPicPr>
+          <p:cNvPr id="4" name="图片 3">
+            <a:extLst>
+              <a:ext uri="{FF2B5EF4-FFF2-40B4-BE49-F238E27FC236}">
+                <a16:creationId xmlns:a16="http://schemas.microsoft.com/office/drawing/2014/main" id="{8B80215E-E760-94BA-9B43-DCF3B6A89710}"/>
+              </a:ext>
+            </a:extLst>
+          </p:cNvPr>
+          <p:cNvPicPr>
+            <a:picLocks noChangeAspect="1"/>
+          </p:cNvPicPr>
+          <p:nvPr/>
+        </p:nvPicPr>
+        <p:blipFill>
+          <a:blip r:embed="rId2"/>
+          <a:srcRect l="509"/>
+          <a:stretch>
+            <a:fillRect/>
+          </a:stretch>
+        </p:blipFill>
+        <p:spPr>
+          <a:xfrm>
+            <a:off x="1127696" y="2567081"/>
+            <a:ext cx="9936607" cy="1723837"/>
+          </a:xfrm>
+          <a:prstGeom prst="rect">
+            <a:avLst/>
+          </a:prstGeom>
+        </p:spPr>
+      </p:pic>
+    </p:spTree>
+    <p:extLst>
+      <p:ext uri="{BB962C8B-B14F-4D97-AF65-F5344CB8AC3E}">
+        <p14:creationId xmlns:p14="http://schemas.microsoft.com/office/powerpoint/2010/main" val="2403988748"/>
+      </p:ext>
+    </p:extLst>
+  </p:cSld>
+  <p:clrMapOvr>
+    <a:masterClrMapping/>
+  </p:clrMapOvr>
+</p:sld>
+</file>
+
+<file path=ppt/slides/slide3.xml><?xml version="1.0" encoding="utf-8"?>
+<p:sld xmlns:a="http://schemas.openxmlformats.org/drawingml/2006/main" xmlns:r="http://schemas.openxmlformats.org/officeDocument/2006/relationships" xmlns:p="http://schemas.openxmlformats.org/presentationml/2006/main">
+  <p:cSld>
+    <p:spTree>
+      <p:nvGrpSpPr>
+        <p:cNvPr id="1" name=""/>
+        <p:cNvGrpSpPr/>
+        <p:nvPr/>
+      </p:nvGrpSpPr>
+      <p:grpSpPr>
+        <a:xfrm>
+          <a:off x="0" y="0"/>
+          <a:ext cx="0" cy="0"/>
+          <a:chOff x="0" y="0"/>
+          <a:chExt cx="0" cy="0"/>
+        </a:xfrm>
+      </p:grpSpPr>
+      <p:grpSp>
+        <p:nvGrpSpPr>
+          <p:cNvPr id="7" name="组合 6"/>
+          <p:cNvGrpSpPr/>
+          <p:nvPr/>
+        </p:nvGrpSpPr>
+        <p:grpSpPr>
+          <a:xfrm>
+            <a:off x="294083" y="1287744"/>
+            <a:ext cx="11603834" cy="4224074"/>
+            <a:chOff x="716561" y="1369452"/>
+            <a:chExt cx="10758878" cy="3916491"/>
+          </a:xfrm>
+        </p:grpSpPr>
+        <p:pic>
+          <p:nvPicPr>
+            <p:cNvPr id="5" name="图片 4"/>
+            <p:cNvPicPr>
+              <a:picLocks noChangeAspect="1"/>
+            </p:cNvPicPr>
+            <p:nvPr/>
+          </p:nvPicPr>
+          <p:blipFill>
+            <a:blip r:embed="rId2"/>
+            <a:stretch>
+              <a:fillRect/>
+            </a:stretch>
+          </p:blipFill>
+          <p:spPr>
+            <a:xfrm>
+              <a:off x="2209800" y="1369452"/>
+              <a:ext cx="7772400" cy="3261632"/>
+            </a:xfrm>
+            <a:prstGeom prst="rect">
+              <a:avLst/>
+            </a:prstGeom>
+          </p:spPr>
+        </p:pic>
+        <p:sp>
+          <p:nvSpPr>
+            <p:cNvPr id="6" name="文本框 5"/>
+            <p:cNvSpPr txBox="1"/>
+            <p:nvPr/>
+          </p:nvSpPr>
+          <p:spPr>
+            <a:xfrm>
+              <a:off x="716561" y="4686676"/>
+              <a:ext cx="10758878" cy="599267"/>
+            </a:xfrm>
+            <a:prstGeom prst="rect">
+              <a:avLst/>
+            </a:prstGeom>
+            <a:noFill/>
+          </p:spPr>
+          <p:txBody>
+            <a:bodyPr wrap="square">
+              <a:spAutoFit/>
+            </a:bodyPr>
+            <a:lstStyle/>
+            <a:p>
+              <a:pPr algn="ctr"/>
+              <a:r>
+                <a:rPr lang="zh-CN" altLang="en-US" sz="3600" b="1" i="0">
+                  <a:solidFill>
+                    <a:srgbClr val="016DAA"/>
+                  </a:solidFill>
+                  <a:effectLst/>
+                  <a:latin typeface="Helvetica" pitchFamily="2" charset="0"/>
+                  <a:ea typeface="黑体" panose="02010609060101010101" pitchFamily="49" charset="-122"/>
+                </a:rPr>
+                <a:t>碳中和与能源智联 国际大科学计划培育项目</a:t>
+              </a:r>
+              <a:endParaRPr lang="zh-CN" altLang="en-US" sz="3200" b="1">
+                <a:solidFill>
+                  <a:srgbClr val="016DAA"/>
+                </a:solidFill>
+                <a:latin typeface="Helvetica" pitchFamily="2" charset="0"/>
+                <a:ea typeface="黑体" panose="02010609060101010101" pitchFamily="49" charset="-122"/>
+              </a:endParaRPr>
+            </a:p>
+          </p:txBody>
+        </p:sp>
+      </p:grpSp>
+    </p:spTree>
+  </p:cSld>
+  <p:clrMapOvr>
+    <a:masterClrMapping/>
+  </p:clrMapOvr>
+</p:sld>
+</file>
+
+<file path=ppt/slides/slide4.xml><?xml version="1.0" encoding="utf-8"?>
+<p:sld xmlns:a="http://schemas.openxmlformats.org/drawingml/2006/main" xmlns:r="http://schemas.openxmlformats.org/officeDocument/2006/relationships" xmlns:p="http://schemas.openxmlformats.org/presentationml/2006/main">
+  <p:cSld>
+    <p:spTree>
+      <p:nvGrpSpPr>
+        <p:cNvPr id="1" name=""/>
+        <p:cNvGrpSpPr/>
+        <p:nvPr/>
+      </p:nvGrpSpPr>
+      <p:grpSpPr>
+        <a:xfrm>
+          <a:off x="0" y="0"/>
+          <a:ext cx="0" cy="0"/>
+          <a:chOff x="0" y="0"/>
+          <a:chExt cx="0" cy="0"/>
+        </a:xfrm>
+      </p:grpSpPr>
+      <p:pic>
+        <p:nvPicPr>
           <p:cNvPr id="5" name="图片 4"/>
           <p:cNvPicPr>
             <a:picLocks noChangeAspect="1"/>
@@ -6197,7 +6418,7 @@
 </p:sld>
 </file>
 
-<file path=ppt/slides/slide3.xml><?xml version="1.0" encoding="utf-8"?>
+<file path=ppt/slides/slide5.xml><?xml version="1.0" encoding="utf-8"?>
 <p:sld xmlns:a="http://schemas.openxmlformats.org/drawingml/2006/main" xmlns:r="http://schemas.openxmlformats.org/officeDocument/2006/relationships" xmlns:p="http://schemas.openxmlformats.org/presentationml/2006/main">
   <p:cSld>
     <p:spTree>
@@ -6247,7 +6468,7 @@
 </p:sld>
 </file>
 
-<file path=ppt/slides/slide4.xml><?xml version="1.0" encoding="utf-8"?>
+<file path=ppt/slides/slide6.xml><?xml version="1.0" encoding="utf-8"?>
 <p:sld xmlns:a="http://schemas.openxmlformats.org/drawingml/2006/main" xmlns:r="http://schemas.openxmlformats.org/officeDocument/2006/relationships" xmlns:p="http://schemas.openxmlformats.org/presentationml/2006/main">
   <p:cSld>
     <p:spTree>
@@ -6297,7 +6518,7 @@
 </p:sld>
 </file>
 
-<file path=ppt/slides/slide5.xml><?xml version="1.0" encoding="utf-8"?>
+<file path=ppt/slides/slide7.xml><?xml version="1.0" encoding="utf-8"?>
 <p:sld xmlns:a="http://schemas.openxmlformats.org/drawingml/2006/main" xmlns:r="http://schemas.openxmlformats.org/officeDocument/2006/relationships" xmlns:p="http://schemas.openxmlformats.org/presentationml/2006/main">
   <p:cSld>
     <p:spTree>
@@ -6346,7 +6567,7 @@
 </p:sld>
 </file>
 
-<file path=ppt/slides/slide6.xml><?xml version="1.0" encoding="utf-8"?>
+<file path=ppt/slides/slide8.xml><?xml version="1.0" encoding="utf-8"?>
 <p:sld xmlns:a="http://schemas.openxmlformats.org/drawingml/2006/main" xmlns:r="http://schemas.openxmlformats.org/officeDocument/2006/relationships" xmlns:p="http://schemas.openxmlformats.org/presentationml/2006/main">
   <p:cSld>
     <p:spTree>
@@ -6395,7 +6616,7 @@
 </p:sld>
 </file>
 
-<file path=ppt/slides/slide7.xml><?xml version="1.0" encoding="utf-8"?>
+<file path=ppt/slides/slide9.xml><?xml version="1.0" encoding="utf-8"?>
 <p:sld xmlns:a="http://schemas.openxmlformats.org/drawingml/2006/main" xmlns:r="http://schemas.openxmlformats.org/officeDocument/2006/relationships" xmlns:p="http://schemas.openxmlformats.org/presentationml/2006/main">
   <p:cSld>
     <p:spTree>
@@ -6430,104 +6651,6 @@
           <a:xfrm>
             <a:off x="1104900" y="1097280"/>
             <a:ext cx="9982200" cy="4663440"/>
-          </a:xfrm>
-          <a:prstGeom prst="rect">
-            <a:avLst/>
-          </a:prstGeom>
-        </p:spPr>
-      </p:pic>
-    </p:spTree>
-  </p:cSld>
-  <p:clrMapOvr>
-    <a:masterClrMapping/>
-  </p:clrMapOvr>
-</p:sld>
-</file>
-
-<file path=ppt/slides/slide8.xml><?xml version="1.0" encoding="utf-8"?>
-<p:sld xmlns:a="http://schemas.openxmlformats.org/drawingml/2006/main" xmlns:r="http://schemas.openxmlformats.org/officeDocument/2006/relationships" xmlns:p="http://schemas.openxmlformats.org/presentationml/2006/main">
-  <p:cSld>
-    <p:spTree>
-      <p:nvGrpSpPr>
-        <p:cNvPr id="1" name=""/>
-        <p:cNvGrpSpPr/>
-        <p:nvPr/>
-      </p:nvGrpSpPr>
-      <p:grpSpPr>
-        <a:xfrm>
-          <a:off x="0" y="0"/>
-          <a:ext cx="0" cy="0"/>
-          <a:chOff x="0" y="0"/>
-          <a:chExt cx="0" cy="0"/>
-        </a:xfrm>
-      </p:grpSpPr>
-      <p:pic>
-        <p:nvPicPr>
-          <p:cNvPr id="4" name="图片 3" descr="envision"/>
-          <p:cNvPicPr>
-            <a:picLocks noChangeAspect="1"/>
-          </p:cNvPicPr>
-          <p:nvPr/>
-        </p:nvPicPr>
-        <p:blipFill>
-          <a:blip r:embed="rId2"/>
-          <a:stretch>
-            <a:fillRect/>
-          </a:stretch>
-        </p:blipFill>
-        <p:spPr>
-          <a:xfrm>
-            <a:off x="1374603" y="2440402"/>
-            <a:ext cx="9442794" cy="1977196"/>
-          </a:xfrm>
-          <a:prstGeom prst="rect">
-            <a:avLst/>
-          </a:prstGeom>
-        </p:spPr>
-      </p:pic>
-    </p:spTree>
-  </p:cSld>
-  <p:clrMapOvr>
-    <a:masterClrMapping/>
-  </p:clrMapOvr>
-</p:sld>
-</file>
-
-<file path=ppt/slides/slide9.xml><?xml version="1.0" encoding="utf-8"?>
-<p:sld xmlns:a="http://schemas.openxmlformats.org/drawingml/2006/main" xmlns:r="http://schemas.openxmlformats.org/officeDocument/2006/relationships" xmlns:p="http://schemas.openxmlformats.org/presentationml/2006/main">
-  <p:cSld>
-    <p:spTree>
-      <p:nvGrpSpPr>
-        <p:cNvPr id="1" name=""/>
-        <p:cNvGrpSpPr/>
-        <p:nvPr/>
-      </p:nvGrpSpPr>
-      <p:grpSpPr>
-        <a:xfrm>
-          <a:off x="0" y="0"/>
-          <a:ext cx="0" cy="0"/>
-          <a:chOff x="0" y="0"/>
-          <a:chExt cx="0" cy="0"/>
-        </a:xfrm>
-      </p:grpSpPr>
-      <p:pic>
-        <p:nvPicPr>
-          <p:cNvPr id="4" name="图片 3" descr="hiq"/>
-          <p:cNvPicPr>
-            <a:picLocks noChangeAspect="1"/>
-          </p:cNvPicPr>
-          <p:nvPr/>
-        </p:nvPicPr>
-        <p:blipFill>
-          <a:blip r:embed="rId2"/>
-          <a:stretch>
-            <a:fillRect/>
-          </a:stretch>
-        </p:blipFill>
-        <p:spPr>
-          <a:xfrm>
-            <a:off x="2845435" y="1471930"/>
-            <a:ext cx="6501765" cy="3914140"/>
           </a:xfrm>
           <a:prstGeom prst="rect">
             <a:avLst/>

--- a/static/img/tg-forum/partner-logo/logos.pptx
+++ b/static/img/tg-forum/partner-logo/logos.pptx
@@ -15,13 +15,14 @@
     <p:sldId id="260" r:id="rId9"/>
     <p:sldId id="261" r:id="rId10"/>
     <p:sldId id="262" r:id="rId11"/>
-    <p:sldId id="263" r:id="rId12"/>
-    <p:sldId id="264" r:id="rId13"/>
-    <p:sldId id="265" r:id="rId14"/>
-    <p:sldId id="271" r:id="rId15"/>
-    <p:sldId id="266" r:id="rId16"/>
-    <p:sldId id="267" r:id="rId17"/>
-    <p:sldId id="272" r:id="rId18"/>
+    <p:sldId id="275" r:id="rId12"/>
+    <p:sldId id="263" r:id="rId13"/>
+    <p:sldId id="264" r:id="rId14"/>
+    <p:sldId id="265" r:id="rId15"/>
+    <p:sldId id="271" r:id="rId16"/>
+    <p:sldId id="266" r:id="rId17"/>
+    <p:sldId id="267" r:id="rId18"/>
+    <p:sldId id="272" r:id="rId19"/>
   </p:sldIdLst>
   <p:sldSz cx="12192000" cy="6858000"/>
   <p:notesSz cx="6858000" cy="9144000"/>
@@ -257,7 +258,7 @@
           <a:p>
             <a:fld id="{26C1D8DE-D085-B844-8474-AFD779F84500}" type="datetimeFigureOut">
               <a:rPr lang="zh-CN" altLang="en-US"/>
-              <a:t>2026/3/3</a:t>
+              <a:t>2026/3/5</a:t>
             </a:fld>
             <a:endParaRPr kumimoji="1" lang="zh-CN" altLang="en-US"/>
           </a:p>
@@ -420,7 +421,7 @@
           <a:p>
             <a:fld id="{26C1D8DE-D085-B844-8474-AFD779F84500}" type="datetimeFigureOut">
               <a:rPr lang="zh-CN" altLang="en-US"/>
-              <a:t>2026/3/3</a:t>
+              <a:t>2026/3/5</a:t>
             </a:fld>
             <a:endParaRPr kumimoji="1" lang="zh-CN" altLang="en-US"/>
           </a:p>
@@ -593,7 +594,7 @@
           <a:p>
             <a:fld id="{26C1D8DE-D085-B844-8474-AFD779F84500}" type="datetimeFigureOut">
               <a:rPr lang="zh-CN" altLang="en-US"/>
-              <a:t>2026/3/3</a:t>
+              <a:t>2026/3/5</a:t>
             </a:fld>
             <a:endParaRPr kumimoji="1" lang="zh-CN" altLang="en-US"/>
           </a:p>
@@ -778,7 +779,7 @@
           <a:p>
             <a:fld id="{26C1D8DE-D085-B844-8474-AFD779F84500}" type="datetimeFigureOut">
               <a:rPr lang="zh-CN" altLang="en-US"/>
-              <a:t>2026/3/3</a:t>
+              <a:t>2026/3/5</a:t>
             </a:fld>
             <a:endParaRPr kumimoji="1" lang="zh-CN" altLang="en-US"/>
           </a:p>
@@ -941,7 +942,7 @@
           <a:p>
             <a:fld id="{26C1D8DE-D085-B844-8474-AFD779F84500}" type="datetimeFigureOut">
               <a:rPr lang="zh-CN" altLang="en-US"/>
-              <a:t>2026/3/3</a:t>
+              <a:t>2026/3/5</a:t>
             </a:fld>
             <a:endParaRPr kumimoji="1" lang="zh-CN" altLang="en-US"/>
           </a:p>
@@ -1181,7 +1182,7 @@
           <a:p>
             <a:fld id="{26C1D8DE-D085-B844-8474-AFD779F84500}" type="datetimeFigureOut">
               <a:rPr lang="zh-CN" altLang="en-US"/>
-              <a:t>2026/3/3</a:t>
+              <a:t>2026/3/5</a:t>
             </a:fld>
             <a:endParaRPr kumimoji="1" lang="zh-CN" altLang="en-US"/>
           </a:p>
@@ -1405,7 +1406,7 @@
           <a:p>
             <a:fld id="{26C1D8DE-D085-B844-8474-AFD779F84500}" type="datetimeFigureOut">
               <a:rPr lang="zh-CN" altLang="en-US"/>
-              <a:t>2026/3/3</a:t>
+              <a:t>2026/3/5</a:t>
             </a:fld>
             <a:endParaRPr kumimoji="1" lang="zh-CN" altLang="en-US"/>
           </a:p>
@@ -1764,7 +1765,7 @@
           <a:p>
             <a:fld id="{26C1D8DE-D085-B844-8474-AFD779F84500}" type="datetimeFigureOut">
               <a:rPr lang="zh-CN" altLang="en-US"/>
-              <a:t>2026/3/3</a:t>
+              <a:t>2026/3/5</a:t>
             </a:fld>
             <a:endParaRPr kumimoji="1" lang="zh-CN" altLang="en-US"/>
           </a:p>
@@ -1876,7 +1877,7 @@
           <a:p>
             <a:fld id="{26C1D8DE-D085-B844-8474-AFD779F84500}" type="datetimeFigureOut">
               <a:rPr lang="zh-CN" altLang="en-US"/>
-              <a:t>2026/3/3</a:t>
+              <a:t>2026/3/5</a:t>
             </a:fld>
             <a:endParaRPr kumimoji="1" lang="zh-CN" altLang="en-US"/>
           </a:p>
@@ -1966,7 +1967,7 @@
           <a:p>
             <a:fld id="{26C1D8DE-D085-B844-8474-AFD779F84500}" type="datetimeFigureOut">
               <a:rPr lang="zh-CN" altLang="en-US"/>
-              <a:t>2026/3/3</a:t>
+              <a:t>2026/3/5</a:t>
             </a:fld>
             <a:endParaRPr kumimoji="1" lang="zh-CN" altLang="en-US"/>
           </a:p>
@@ -2236,7 +2237,7 @@
           <a:p>
             <a:fld id="{26C1D8DE-D085-B844-8474-AFD779F84500}" type="datetimeFigureOut">
               <a:rPr lang="zh-CN" altLang="en-US"/>
-              <a:t>2026/3/3</a:t>
+              <a:t>2026/3/5</a:t>
             </a:fld>
             <a:endParaRPr kumimoji="1" lang="zh-CN" altLang="en-US"/>
           </a:p>
@@ -2399,7 +2400,7 @@
           <a:p>
             <a:fld id="{26C1D8DE-D085-B844-8474-AFD779F84500}" type="datetimeFigureOut">
               <a:rPr lang="zh-CN" altLang="en-US"/>
-              <a:t>2026/3/3</a:t>
+              <a:t>2026/3/5</a:t>
             </a:fld>
             <a:endParaRPr kumimoji="1" lang="zh-CN" altLang="en-US"/>
           </a:p>
@@ -2646,7 +2647,7 @@
           <a:p>
             <a:fld id="{26C1D8DE-D085-B844-8474-AFD779F84500}" type="datetimeFigureOut">
               <a:rPr lang="zh-CN" altLang="en-US"/>
-              <a:t>2026/3/3</a:t>
+              <a:t>2026/3/5</a:t>
             </a:fld>
             <a:endParaRPr kumimoji="1" lang="zh-CN" altLang="en-US"/>
           </a:p>
@@ -2809,7 +2810,7 @@
           <a:p>
             <a:fld id="{26C1D8DE-D085-B844-8474-AFD779F84500}" type="datetimeFigureOut">
               <a:rPr lang="zh-CN" altLang="en-US"/>
-              <a:t>2026/3/3</a:t>
+              <a:t>2026/3/5</a:t>
             </a:fld>
             <a:endParaRPr kumimoji="1" lang="zh-CN" altLang="en-US"/>
           </a:p>
@@ -2982,7 +2983,7 @@
           <a:p>
             <a:fld id="{26C1D8DE-D085-B844-8474-AFD779F84500}" type="datetimeFigureOut">
               <a:rPr lang="zh-CN" altLang="en-US"/>
-              <a:t>2026/3/3</a:t>
+              <a:t>2026/3/5</a:t>
             </a:fld>
             <a:endParaRPr kumimoji="1" lang="zh-CN" altLang="en-US"/>
           </a:p>
@@ -3222,7 +3223,7 @@
           <a:p>
             <a:fld id="{26C1D8DE-D085-B844-8474-AFD779F84500}" type="datetimeFigureOut">
               <a:rPr lang="zh-CN" altLang="en-US"/>
-              <a:t>2026/3/3</a:t>
+              <a:t>2026/3/5</a:t>
             </a:fld>
             <a:endParaRPr kumimoji="1" lang="zh-CN" altLang="en-US"/>
           </a:p>
@@ -3446,7 +3447,7 @@
           <a:p>
             <a:fld id="{26C1D8DE-D085-B844-8474-AFD779F84500}" type="datetimeFigureOut">
               <a:rPr lang="zh-CN" altLang="en-US"/>
-              <a:t>2026/3/3</a:t>
+              <a:t>2026/3/5</a:t>
             </a:fld>
             <a:endParaRPr kumimoji="1" lang="zh-CN" altLang="en-US"/>
           </a:p>
@@ -3805,7 +3806,7 @@
           <a:p>
             <a:fld id="{26C1D8DE-D085-B844-8474-AFD779F84500}" type="datetimeFigureOut">
               <a:rPr lang="zh-CN" altLang="en-US"/>
-              <a:t>2026/3/3</a:t>
+              <a:t>2026/3/5</a:t>
             </a:fld>
             <a:endParaRPr kumimoji="1" lang="zh-CN" altLang="en-US"/>
           </a:p>
@@ -3917,7 +3918,7 @@
           <a:p>
             <a:fld id="{26C1D8DE-D085-B844-8474-AFD779F84500}" type="datetimeFigureOut">
               <a:rPr lang="zh-CN" altLang="en-US"/>
-              <a:t>2026/3/3</a:t>
+              <a:t>2026/3/5</a:t>
             </a:fld>
             <a:endParaRPr kumimoji="1" lang="zh-CN" altLang="en-US"/>
           </a:p>
@@ -4007,7 +4008,7 @@
           <a:p>
             <a:fld id="{26C1D8DE-D085-B844-8474-AFD779F84500}" type="datetimeFigureOut">
               <a:rPr lang="zh-CN" altLang="en-US"/>
-              <a:t>2026/3/3</a:t>
+              <a:t>2026/3/5</a:t>
             </a:fld>
             <a:endParaRPr kumimoji="1" lang="zh-CN" altLang="en-US"/>
           </a:p>
@@ -4277,7 +4278,7 @@
           <a:p>
             <a:fld id="{26C1D8DE-D085-B844-8474-AFD779F84500}" type="datetimeFigureOut">
               <a:rPr lang="zh-CN" altLang="en-US"/>
-              <a:t>2026/3/3</a:t>
+              <a:t>2026/3/5</a:t>
             </a:fld>
             <a:endParaRPr kumimoji="1" lang="zh-CN" altLang="en-US"/>
           </a:p>
@@ -4524,7 +4525,7 @@
           <a:p>
             <a:fld id="{26C1D8DE-D085-B844-8474-AFD779F84500}" type="datetimeFigureOut">
               <a:rPr lang="zh-CN" altLang="en-US"/>
-              <a:t>2026/3/3</a:t>
+              <a:t>2026/3/5</a:t>
             </a:fld>
             <a:endParaRPr kumimoji="1" lang="zh-CN" altLang="en-US"/>
           </a:p>
@@ -4730,7 +4731,7 @@
           <a:p>
             <a:fld id="{26C1D8DE-D085-B844-8474-AFD779F84500}" type="datetimeFigureOut">
               <a:rPr lang="zh-CN" altLang="en-US"/>
-              <a:t>2026/3/3</a:t>
+              <a:t>2026/3/5</a:t>
             </a:fld>
             <a:endParaRPr kumimoji="1" lang="zh-CN" altLang="en-US"/>
           </a:p>
@@ -5263,7 +5264,7 @@
           <a:p>
             <a:fld id="{26C1D8DE-D085-B844-8474-AFD779F84500}" type="datetimeFigureOut">
               <a:rPr lang="zh-CN" altLang="en-US"/>
-              <a:t>2026/3/3</a:t>
+              <a:t>2026/3/5</a:t>
             </a:fld>
             <a:endParaRPr kumimoji="1" lang="zh-CN" altLang="en-US"/>
           </a:p>
@@ -5725,6 +5726,66 @@
       </p:grpSpPr>
       <p:pic>
         <p:nvPicPr>
+          <p:cNvPr id="5" name="图片 4" descr="形状&#10;&#10;AI 生成的内容可能不正确。">
+            <a:extLst>
+              <a:ext uri="{FF2B5EF4-FFF2-40B4-BE49-F238E27FC236}">
+                <a16:creationId xmlns:a16="http://schemas.microsoft.com/office/drawing/2014/main" id="{17DEDA46-0A1E-CFF5-2D82-FB5CC2667AFE}"/>
+              </a:ext>
+            </a:extLst>
+          </p:cNvPr>
+          <p:cNvPicPr>
+            <a:picLocks noChangeAspect="1"/>
+          </p:cNvPicPr>
+          <p:nvPr/>
+        </p:nvPicPr>
+        <p:blipFill>
+          <a:blip r:embed="rId2"/>
+          <a:stretch>
+            <a:fillRect/>
+          </a:stretch>
+        </p:blipFill>
+        <p:spPr>
+          <a:xfrm>
+            <a:off x="1740152" y="2718126"/>
+            <a:ext cx="8711695" cy="1421748"/>
+          </a:xfrm>
+          <a:prstGeom prst="rect">
+            <a:avLst/>
+          </a:prstGeom>
+        </p:spPr>
+      </p:pic>
+    </p:spTree>
+    <p:extLst>
+      <p:ext uri="{BB962C8B-B14F-4D97-AF65-F5344CB8AC3E}">
+        <p14:creationId xmlns:p14="http://schemas.microsoft.com/office/powerpoint/2010/main" val="2657395210"/>
+      </p:ext>
+    </p:extLst>
+  </p:cSld>
+  <p:clrMapOvr>
+    <a:masterClrMapping/>
+  </p:clrMapOvr>
+</p:sld>
+</file>
+
+<file path=ppt/slides/slide11.xml><?xml version="1.0" encoding="utf-8"?>
+<p:sld xmlns:a="http://schemas.openxmlformats.org/drawingml/2006/main" xmlns:r="http://schemas.openxmlformats.org/officeDocument/2006/relationships" xmlns:p="http://schemas.openxmlformats.org/presentationml/2006/main">
+  <p:cSld>
+    <p:spTree>
+      <p:nvGrpSpPr>
+        <p:cNvPr id="1" name=""/>
+        <p:cNvGrpSpPr/>
+        <p:nvPr/>
+      </p:nvGrpSpPr>
+      <p:grpSpPr>
+        <a:xfrm>
+          <a:off x="0" y="0"/>
+          <a:ext cx="0" cy="0"/>
+          <a:chOff x="0" y="0"/>
+          <a:chExt cx="0" cy="0"/>
+        </a:xfrm>
+      </p:grpSpPr>
+      <p:pic>
+        <p:nvPicPr>
           <p:cNvPr id="4" name="图片 3" descr="envision"/>
           <p:cNvPicPr>
             <a:picLocks noChangeAspect="1"/>
@@ -5755,7 +5816,7 @@
 </p:sld>
 </file>
 
-<file path=ppt/slides/slide11.xml><?xml version="1.0" encoding="utf-8"?>
+<file path=ppt/slides/slide12.xml><?xml version="1.0" encoding="utf-8"?>
 <p:sld xmlns:a="http://schemas.openxmlformats.org/drawingml/2006/main" xmlns:r="http://schemas.openxmlformats.org/officeDocument/2006/relationships" xmlns:p="http://schemas.openxmlformats.org/presentationml/2006/main">
   <p:cSld>
     <p:spTree>
@@ -5804,7 +5865,7 @@
 </p:sld>
 </file>
 
-<file path=ppt/slides/slide12.xml><?xml version="1.0" encoding="utf-8"?>
+<file path=ppt/slides/slide13.xml><?xml version="1.0" encoding="utf-8"?>
 <p:sld xmlns:a="http://schemas.openxmlformats.org/drawingml/2006/main" xmlns:r="http://schemas.openxmlformats.org/officeDocument/2006/relationships" xmlns:p="http://schemas.openxmlformats.org/presentationml/2006/main">
   <p:cSld>
     <p:spTree>
@@ -5853,7 +5914,7 @@
 </p:sld>
 </file>
 
-<file path=ppt/slides/slide13.xml><?xml version="1.0" encoding="utf-8"?>
+<file path=ppt/slides/slide14.xml><?xml version="1.0" encoding="utf-8"?>
 <p:sld xmlns:a="http://schemas.openxmlformats.org/drawingml/2006/main" xmlns:r="http://schemas.openxmlformats.org/officeDocument/2006/relationships" xmlns:p="http://schemas.openxmlformats.org/presentationml/2006/main">
   <p:cSld>
     <p:spTree>
@@ -5902,7 +5963,7 @@
 </p:sld>
 </file>
 
-<file path=ppt/slides/slide14.xml><?xml version="1.0" encoding="utf-8"?>
+<file path=ppt/slides/slide15.xml><?xml version="1.0" encoding="utf-8"?>
 <p:sld xmlns:a="http://schemas.openxmlformats.org/drawingml/2006/main" xmlns:r="http://schemas.openxmlformats.org/officeDocument/2006/relationships" xmlns:p="http://schemas.openxmlformats.org/presentationml/2006/main">
   <p:cSld>
     <p:spTree>
@@ -5951,7 +6012,7 @@
 </p:sld>
 </file>
 
-<file path=ppt/slides/slide15.xml><?xml version="1.0" encoding="utf-8"?>
+<file path=ppt/slides/slide16.xml><?xml version="1.0" encoding="utf-8"?>
 <p:sld xmlns:a="http://schemas.openxmlformats.org/drawingml/2006/main" xmlns:r="http://schemas.openxmlformats.org/officeDocument/2006/relationships" xmlns:p="http://schemas.openxmlformats.org/presentationml/2006/main">
   <p:cSld>
     <p:spTree>
@@ -6000,7 +6061,7 @@
 </p:sld>
 </file>
 
-<file path=ppt/slides/slide16.xml><?xml version="1.0" encoding="utf-8"?>
+<file path=ppt/slides/slide17.xml><?xml version="1.0" encoding="utf-8"?>
 <p:sld xmlns:a="http://schemas.openxmlformats.org/drawingml/2006/main" xmlns:r="http://schemas.openxmlformats.org/officeDocument/2006/relationships" xmlns:p="http://schemas.openxmlformats.org/presentationml/2006/main">
   <p:cSld>
     <p:spTree>
